--- a/dist/초3/국어/발표와쓰기/초3_국어_발표와쓰기_01_조사한내용발표하기_학생용.pptx
+++ b/dist/초3/국어/발표와쓰기/초3_국어_발표와쓰기_01_조사한내용발표하기_학생용.pptx
@@ -118,38 +118,38 @@
   <p:extLst>
     <p:ext uri="{521415D9-36F7-43E2-AB2F-B90AF26B5E84}">
       <p14:sectionLst xmlns:p14="http://schemas.microsoft.com/office/powerpoint/2010/main">
-        <p14:section name="도입" id="{47473a55-3ac8-fdeb-31ef-a9591194d5f8}">
+        <p14:section name="도입" id="{518b55c5-f7d5-2f7c-af6e-799618f41443}">
           <p14:sldIdLst>
             <p14:sldId id="256"/>
             <p14:sldId id="257"/>
           </p14:sldIdLst>
         </p14:section>
-        <p14:section name="개념" id="{dad3807d-f867-27ea-7356-86928bd17cbd}">
+        <p14:section name="개념" id="{098a71ea-1d9d-7d3f-18a5-4ec39536673b}">
           <p14:sldIdLst>
             <p14:sldId id="258"/>
             <p14:sldId id="259"/>
             <p14:sldId id="260"/>
           </p14:sldIdLst>
         </p14:section>
-        <p14:section name="연습" id="{3a1fc84b-ae45-9b77-5a14-a26c72a762f4}">
+        <p14:section name="연습" id="{30cfd5bf-19a3-5228-60c5-d7c6c4823348}">
           <p14:sldIdLst>
             <p14:sldId id="261"/>
             <p14:sldId id="262"/>
             <p14:sldId id="263"/>
           </p14:sldIdLst>
         </p14:section>
-        <p14:section name="확인" id="{1bad3a28-792b-8c98-1f56-c4629f8f4735}">
+        <p14:section name="확인" id="{64a43b6f-d70f-cba7-68ba-f5fd4870d7c8}">
           <p14:sldIdLst>
             <p14:sldId id="264"/>
             <p14:sldId id="265"/>
           </p14:sldIdLst>
         </p14:section>
-        <p14:section name="정리" id="{7cd80f1c-5d99-be7d-9acd-fae8e1d245ee}">
+        <p14:section name="정리" id="{7d22a2c4-830e-6ae5-7c4b-9acdc43a41aa}">
           <p14:sldIdLst>
             <p14:sldId id="266"/>
           </p14:sldIdLst>
         </p14:section>
-        <p14:section name="보충" id="{d7e05a99-3fec-7bed-d3d8-44acda55872e}">
+        <p14:section name="보충" id="{08da44c8-260f-e68e-c51c-92a317a6d6c4}">
           <p14:sldIdLst>
             <p14:sldId id="267"/>
           </p14:sldIdLst>
@@ -2605,7 +2605,7 @@
           <a:bodyPr wrap="square" lIns="0" tIns="0" rIns="0" bIns="0" rtlCol="0" anchor="ctr"/>
           <a:lstStyle/>
           <a:p>
-            <a:pPr algn="l" indent="0" marL="0">
+            <a:pPr eaLnBrk="0" algn="l" indent="0" marL="0">
               <a:buNone/>
             </a:pPr>
             <a:r>
@@ -2646,7 +2646,7 @@
           <a:bodyPr wrap="square" lIns="0" tIns="0" rIns="0" bIns="0" rtlCol="0" anchor="t"/>
           <a:lstStyle/>
           <a:p>
-            <a:pPr indent="0" marL="0">
+            <a:pPr eaLnBrk="0" indent="0" marL="0">
               <a:buNone/>
             </a:pPr>
             <a:r>
@@ -2663,7 +2663,7 @@
             <a:endParaRPr lang="ko-KR" sz="3000" dirty="0"/>
           </a:p>
           <a:p>
-            <a:pPr indent="0" marL="0">
+            <a:pPr eaLnBrk="0" indent="0" marL="0">
               <a:buNone/>
             </a:pPr>
             <a:r>
@@ -2729,7 +2729,7 @@
           <a:bodyPr wrap="square" lIns="0" tIns="0" rIns="0" bIns="0" rtlCol="0" anchor="ctr"/>
           <a:lstStyle/>
           <a:p>
-            <a:pPr indent="0" marL="0">
+            <a:pPr eaLnBrk="0" indent="0" marL="0">
               <a:spcAft>
                 <a:spcPts val="600"/>
               </a:spcAft>
@@ -2749,7 +2749,7 @@
             <a:endParaRPr lang="ko-KR" sz="3000" dirty="0"/>
           </a:p>
           <a:p>
-            <a:pPr indent="0" marL="0">
+            <a:pPr eaLnBrk="0" indent="0" marL="0">
               <a:spcAft>
                 <a:spcPts val="600"/>
               </a:spcAft>
@@ -2769,7 +2769,7 @@
             <a:endParaRPr lang="ko-KR" sz="3000" dirty="0"/>
           </a:p>
           <a:p>
-            <a:pPr indent="0" marL="0">
+            <a:pPr eaLnBrk="0" indent="0" marL="0">
               <a:spcAft>
                 <a:spcPts val="600"/>
               </a:spcAft>
@@ -2838,7 +2838,7 @@
           <a:bodyPr wrap="square" lIns="0" tIns="0" rIns="0" bIns="0" rtlCol="0" anchor="ctr"/>
           <a:lstStyle/>
           <a:p>
-            <a:pPr algn="l" indent="0" marL="0">
+            <a:pPr eaLnBrk="0" algn="l" indent="0" marL="0">
               <a:buNone/>
             </a:pPr>
             <a:r>
@@ -2904,7 +2904,7 @@
           <a:bodyPr wrap="square" lIns="0" tIns="0" rIns="0" bIns="0" rtlCol="0" anchor="ctr"/>
           <a:lstStyle/>
           <a:p>
-            <a:pPr indent="0" marL="0">
+            <a:pPr eaLnBrk="0" indent="0" marL="0">
               <a:spcAft>
                 <a:spcPts val="600"/>
               </a:spcAft>
@@ -2954,7 +2954,7 @@
           <a:bodyPr wrap="square" lIns="0" tIns="0" rIns="0" bIns="0" rtlCol="0" anchor="ctr"/>
           <a:lstStyle/>
           <a:p>
-            <a:pPr algn="ctr" indent="0" marL="0">
+            <a:pPr eaLnBrk="0" algn="ctr" indent="0" marL="0">
               <a:buNone/>
             </a:pPr>
             <a:r>
@@ -3020,7 +3020,7 @@
           <a:bodyPr wrap="square" lIns="0" tIns="0" rIns="0" bIns="0" rtlCol="0" anchor="ctr"/>
           <a:lstStyle/>
           <a:p>
-            <a:pPr indent="0" marL="0">
+            <a:pPr eaLnBrk="0" indent="0" marL="0">
               <a:spcAft>
                 <a:spcPts val="600"/>
               </a:spcAft>
@@ -3040,7 +3040,7 @@
             <a:endParaRPr lang="ko-KR" sz="3000" dirty="0"/>
           </a:p>
           <a:p>
-            <a:pPr indent="0" marL="0">
+            <a:pPr eaLnBrk="0" indent="0" marL="0">
               <a:spcAft>
                 <a:spcPts val="600"/>
               </a:spcAft>
@@ -3060,7 +3060,7 @@
             <a:endParaRPr lang="ko-KR" sz="3000" dirty="0"/>
           </a:p>
           <a:p>
-            <a:pPr indent="0" marL="0">
+            <a:pPr eaLnBrk="0" indent="0" marL="0">
               <a:spcAft>
                 <a:spcPts val="600"/>
               </a:spcAft>
@@ -3110,7 +3110,7 @@
           <a:bodyPr wrap="square" lIns="0" tIns="0" rIns="0" bIns="0" rtlCol="0" anchor="ctr"/>
           <a:lstStyle/>
           <a:p>
-            <a:pPr algn="ctr" indent="0" marL="0">
+            <a:pPr eaLnBrk="0" algn="ctr" indent="0" marL="0">
               <a:buNone/>
             </a:pPr>
             <a:r>
@@ -3176,7 +3176,7 @@
           <a:bodyPr wrap="square" lIns="0" tIns="0" rIns="0" bIns="0" rtlCol="0" anchor="ctr"/>
           <a:lstStyle/>
           <a:p>
-            <a:pPr indent="0" marL="0">
+            <a:pPr eaLnBrk="0" indent="0" marL="0">
               <a:spcAft>
                 <a:spcPts val="600"/>
               </a:spcAft>
@@ -3196,7 +3196,7 @@
             <a:endParaRPr lang="ko-KR" sz="3000" dirty="0"/>
           </a:p>
           <a:p>
-            <a:pPr indent="0" marL="0">
+            <a:pPr eaLnBrk="0" indent="0" marL="0">
               <a:spcAft>
                 <a:spcPts val="600"/>
               </a:spcAft>
@@ -3216,7 +3216,7 @@
             <a:endParaRPr lang="ko-KR" sz="3000" dirty="0"/>
           </a:p>
           <a:p>
-            <a:pPr indent="0" marL="0">
+            <a:pPr eaLnBrk="0" indent="0" marL="0">
               <a:spcAft>
                 <a:spcPts val="600"/>
               </a:spcAft>
@@ -3266,7 +3266,7 @@
           <a:bodyPr wrap="square" lIns="0" tIns="0" rIns="0" bIns="0" rtlCol="0" anchor="ctr"/>
           <a:lstStyle/>
           <a:p>
-            <a:pPr algn="ctr" indent="0" marL="0">
+            <a:pPr eaLnBrk="0" algn="ctr" indent="0" marL="0">
               <a:buNone/>
             </a:pPr>
             <a:r>
@@ -3332,7 +3332,7 @@
           <a:bodyPr wrap="square" lIns="0" tIns="0" rIns="0" bIns="0" rtlCol="0" anchor="ctr"/>
           <a:lstStyle/>
           <a:p>
-            <a:pPr indent="0" marL="0">
+            <a:pPr eaLnBrk="0" indent="0" marL="0">
               <a:spcAft>
                 <a:spcPts val="600"/>
               </a:spcAft>
@@ -3352,7 +3352,7 @@
             <a:endParaRPr lang="ko-KR" sz="3000" dirty="0"/>
           </a:p>
           <a:p>
-            <a:pPr indent="0" marL="0">
+            <a:pPr eaLnBrk="0" indent="0" marL="0">
               <a:spcAft>
                 <a:spcPts val="600"/>
               </a:spcAft>
@@ -3372,7 +3372,7 @@
             <a:endParaRPr lang="ko-KR" sz="3000" dirty="0"/>
           </a:p>
           <a:p>
-            <a:pPr indent="0" marL="0">
+            <a:pPr eaLnBrk="0" indent="0" marL="0">
               <a:spcAft>
                 <a:spcPts val="600"/>
               </a:spcAft>
@@ -3392,7 +3392,7 @@
             <a:endParaRPr lang="ko-KR" sz="3000" dirty="0"/>
           </a:p>
           <a:p>
-            <a:pPr indent="0" marL="0">
+            <a:pPr eaLnBrk="0" indent="0" marL="0">
               <a:spcAft>
                 <a:spcPts val="600"/>
               </a:spcAft>
@@ -3452,7 +3452,7 @@
             </a:lvl1pPr>
           </a:lstStyle>
           <a:p>
-            <a:pPr algn="r"/>
+            <a:pPr eaLnBrk="0" algn="r"/>
             <a:fld id="{F7021451-1387-4CA6-816F-3879F97B5CBC}" type="slidenum">
               <a:rPr b="0" lang="en-US"/>
               <a:t>10</a:t>
@@ -3509,7 +3509,7 @@
           <a:bodyPr wrap="square" lIns="0" tIns="0" rIns="0" bIns="0" rtlCol="0" anchor="ctr"/>
           <a:lstStyle/>
           <a:p>
-            <a:pPr algn="l" indent="0" marL="0">
+            <a:pPr eaLnBrk="0" algn="l" indent="0" marL="0">
               <a:buNone/>
             </a:pPr>
             <a:r>
@@ -3575,7 +3575,7 @@
           <a:bodyPr wrap="square" lIns="0" tIns="0" rIns="0" bIns="0" rtlCol="0" anchor="ctr"/>
           <a:lstStyle/>
           <a:p>
-            <a:pPr indent="0" marL="0">
+            <a:pPr eaLnBrk="0" indent="0" marL="0">
               <a:spcAft>
                 <a:spcPts val="600"/>
               </a:spcAft>
@@ -3595,7 +3595,7 @@
             <a:endParaRPr lang="ko-KR" sz="3000" dirty="0"/>
           </a:p>
           <a:p>
-            <a:pPr indent="0" marL="0">
+            <a:pPr eaLnBrk="0" indent="0" marL="0">
               <a:spcAft>
                 <a:spcPts val="600"/>
               </a:spcAft>
@@ -3645,7 +3645,7 @@
           <a:bodyPr wrap="square" lIns="177800" tIns="0" rIns="177800" bIns="0" rtlCol="0" anchor="ctr"/>
           <a:lstStyle/>
           <a:p>
-            <a:pPr algn="l" indent="0" marL="0">
+            <a:pPr eaLnBrk="0" algn="l" indent="0" marL="0">
               <a:buNone/>
             </a:pPr>
             <a:r>
@@ -3692,7 +3692,7 @@
           <a:bodyPr wrap="square" lIns="177800" tIns="0" rIns="177800" bIns="0" rtlCol="0" anchor="ctr"/>
           <a:lstStyle/>
           <a:p>
-            <a:pPr algn="l" indent="0" marL="0">
+            <a:pPr eaLnBrk="0" algn="l" indent="0" marL="0">
               <a:buNone/>
             </a:pPr>
             <a:r>
@@ -3731,7 +3731,7 @@
           <a:bodyPr wrap="square" lIns="0" tIns="0" rIns="0" bIns="0" rtlCol="0" anchor="t"/>
           <a:lstStyle/>
           <a:p>
-            <a:pPr algn="l" indent="0" marL="0">
+            <a:pPr eaLnBrk="0" algn="l" indent="0" marL="0">
               <a:buNone/>
             </a:pPr>
             <a:r>
@@ -3770,7 +3770,7 @@
           <a:bodyPr wrap="square" lIns="0" tIns="0" rIns="0" bIns="0" rtlCol="0" anchor="ctr"/>
           <a:lstStyle/>
           <a:p>
-            <a:pPr algn="l" indent="0" marL="0">
+            <a:pPr eaLnBrk="0" algn="l" indent="0" marL="0">
               <a:buNone/>
             </a:pPr>
             <a:r>
@@ -3809,7 +3809,7 @@
           <a:bodyPr wrap="square" lIns="0" tIns="0" rIns="0" bIns="0" rtlCol="0" anchor="ctr"/>
           <a:lstStyle/>
           <a:p>
-            <a:pPr algn="l" indent="0" marL="0">
+            <a:pPr eaLnBrk="0" algn="l" indent="0" marL="0">
               <a:buNone/>
             </a:pPr>
             <a:r>
@@ -3848,7 +3848,7 @@
           <a:bodyPr wrap="square" lIns="0" tIns="0" rIns="0" bIns="0" rtlCol="0" anchor="ctr"/>
           <a:lstStyle/>
           <a:p>
-            <a:pPr algn="l" indent="0" marL="0">
+            <a:pPr eaLnBrk="0" algn="l" indent="0" marL="0">
               <a:buNone/>
             </a:pPr>
             <a:r>
@@ -3887,7 +3887,7 @@
           <a:bodyPr wrap="square" lIns="0" tIns="0" rIns="0" bIns="0" rtlCol="0" anchor="ctr"/>
           <a:lstStyle/>
           <a:p>
-            <a:pPr algn="l" indent="0" marL="0">
+            <a:pPr eaLnBrk="0" algn="l" indent="0" marL="0">
               <a:buNone/>
             </a:pPr>
             <a:r>
@@ -3944,7 +3944,7 @@
             </a:lvl1pPr>
           </a:lstStyle>
           <a:p>
-            <a:pPr algn="r"/>
+            <a:pPr eaLnBrk="0" algn="r"/>
             <a:fld id="{F7021451-1387-4CA6-816F-3879F97B5CBC}" type="slidenum">
               <a:rPr b="0" lang="en-US"/>
               <a:t>11</a:t>
@@ -4001,7 +4001,7 @@
           <a:bodyPr wrap="square" lIns="0" tIns="0" rIns="0" bIns="0" rtlCol="0" anchor="ctr"/>
           <a:lstStyle/>
           <a:p>
-            <a:pPr algn="l" indent="0" marL="0">
+            <a:pPr eaLnBrk="0" algn="l" indent="0" marL="0">
               <a:buNone/>
             </a:pPr>
             <a:r>
@@ -4040,7 +4040,7 @@
           <a:bodyPr wrap="square" lIns="0" tIns="0" rIns="0" bIns="0" rtlCol="0" anchor="ctr"/>
           <a:lstStyle/>
           <a:p>
-            <a:pPr algn="l" indent="0" marL="0">
+            <a:pPr eaLnBrk="0" algn="l" indent="0" marL="0">
               <a:buNone/>
             </a:pPr>
             <a:r>
@@ -4106,7 +4106,7 @@
           <a:bodyPr wrap="square" lIns="0" tIns="0" rIns="0" bIns="0" rtlCol="0" anchor="ctr"/>
           <a:lstStyle/>
           <a:p>
-            <a:pPr indent="0" marL="0">
+            <a:pPr eaLnBrk="0" indent="0" marL="0">
               <a:spcAft>
                 <a:spcPts val="600"/>
               </a:spcAft>
@@ -4156,7 +4156,7 @@
           <a:bodyPr wrap="square" lIns="76200" tIns="50800" rIns="76200" bIns="50800" rtlCol="0" anchor="ctr"/>
           <a:lstStyle/>
           <a:p>
-            <a:pPr algn="ctr" indent="0" marL="0">
+            <a:pPr eaLnBrk="0" algn="ctr" indent="0" marL="0">
               <a:buNone/>
             </a:pPr>
             <a:r>
@@ -4173,7 +4173,7 @@
             <a:endParaRPr lang="ko-KR" sz="2400" dirty="0"/>
           </a:p>
           <a:p>
-            <a:pPr algn="ctr" indent="0" marL="0">
+            <a:pPr eaLnBrk="0" algn="ctr" indent="0" marL="0">
               <a:buNone/>
             </a:pPr>
             <a:r>
@@ -4190,7 +4190,7 @@
             <a:endParaRPr lang="ko-KR" sz="2400" dirty="0"/>
           </a:p>
           <a:p>
-            <a:pPr algn="ctr" indent="0" marL="0">
+            <a:pPr eaLnBrk="0" algn="ctr" indent="0" marL="0">
               <a:buNone/>
             </a:pPr>
             <a:r>
@@ -4207,7 +4207,7 @@
             <a:endParaRPr lang="ko-KR" sz="2400" dirty="0"/>
           </a:p>
           <a:p>
-            <a:pPr algn="ctr" indent="0" marL="0">
+            <a:pPr eaLnBrk="0" algn="ctr" indent="0" marL="0">
               <a:buNone/>
             </a:pPr>
             <a:r>
@@ -4278,7 +4278,7 @@
           <a:bodyPr wrap="square" lIns="76200" tIns="50800" rIns="76200" bIns="50800" rtlCol="0" anchor="ctr"/>
           <a:lstStyle/>
           <a:p>
-            <a:pPr algn="ctr" indent="0" marL="0">
+            <a:pPr eaLnBrk="0" algn="ctr" indent="0" marL="0">
               <a:buNone/>
             </a:pPr>
             <a:r>
@@ -4295,7 +4295,7 @@
             <a:endParaRPr lang="ko-KR" sz="2400" dirty="0"/>
           </a:p>
           <a:p>
-            <a:pPr algn="ctr" indent="0" marL="0">
+            <a:pPr eaLnBrk="0" algn="ctr" indent="0" marL="0">
               <a:buNone/>
             </a:pPr>
             <a:r>
@@ -4366,7 +4366,7 @@
           <a:bodyPr wrap="square" lIns="76200" tIns="50800" rIns="76200" bIns="50800" rtlCol="0" anchor="ctr"/>
           <a:lstStyle/>
           <a:p>
-            <a:pPr algn="ctr" indent="0" marL="0">
+            <a:pPr eaLnBrk="0" algn="ctr" indent="0" marL="0">
               <a:buNone/>
             </a:pPr>
             <a:r>
@@ -4383,7 +4383,7 @@
             <a:endParaRPr lang="ko-KR" sz="2400" dirty="0"/>
           </a:p>
           <a:p>
-            <a:pPr algn="ctr" indent="0" marL="0">
+            <a:pPr eaLnBrk="0" algn="ctr" indent="0" marL="0">
               <a:buNone/>
             </a:pPr>
             <a:r>
@@ -4400,7 +4400,7 @@
             <a:endParaRPr lang="ko-KR" sz="2400" dirty="0"/>
           </a:p>
           <a:p>
-            <a:pPr algn="ctr" indent="0" marL="0">
+            <a:pPr eaLnBrk="0" algn="ctr" indent="0" marL="0">
               <a:buNone/>
             </a:pPr>
             <a:r>
@@ -4457,7 +4457,7 @@
             </a:lvl1pPr>
           </a:lstStyle>
           <a:p>
-            <a:pPr algn="r"/>
+            <a:pPr eaLnBrk="0" algn="r"/>
             <a:fld id="{F7021451-1387-4CA6-816F-3879F97B5CBC}" type="slidenum">
               <a:rPr b="0" lang="en-US"/>
               <a:t>12</a:t>
@@ -4514,7 +4514,7 @@
           <a:bodyPr wrap="square" lIns="0" tIns="0" rIns="0" bIns="0" rtlCol="0" anchor="ctr"/>
           <a:lstStyle/>
           <a:p>
-            <a:pPr algn="l" indent="0" marL="0">
+            <a:pPr eaLnBrk="0" algn="l" indent="0" marL="0">
               <a:buNone/>
             </a:pPr>
             <a:r>
@@ -4553,7 +4553,7 @@
           <a:bodyPr wrap="square" lIns="0" tIns="0" rIns="0" bIns="0" rtlCol="0" anchor="ctr"/>
           <a:lstStyle/>
           <a:p>
-            <a:pPr algn="l" indent="0" marL="0">
+            <a:pPr eaLnBrk="0" algn="l" indent="0" marL="0">
               <a:buNone/>
             </a:pPr>
             <a:r>
@@ -4600,7 +4600,7 @@
           <a:bodyPr wrap="square" lIns="0" tIns="0" rIns="0" bIns="0" rtlCol="0" anchor="ctr"/>
           <a:lstStyle/>
           <a:p>
-            <a:pPr algn="ctr" indent="0" marL="0">
+            <a:pPr eaLnBrk="0" algn="ctr" indent="0" marL="0">
               <a:buNone/>
             </a:pPr>
             <a:r>
@@ -4639,7 +4639,7 @@
           <a:bodyPr wrap="square" lIns="0" tIns="0" rIns="0" bIns="0" rtlCol="0" anchor="ctr"/>
           <a:lstStyle/>
           <a:p>
-            <a:pPr algn="l" indent="0" marL="0">
+            <a:pPr eaLnBrk="0" algn="l" indent="0" marL="0">
               <a:buNone/>
             </a:pPr>
             <a:r>
@@ -4686,7 +4686,7 @@
           <a:bodyPr wrap="square" lIns="0" tIns="0" rIns="0" bIns="0" rtlCol="0" anchor="ctr"/>
           <a:lstStyle/>
           <a:p>
-            <a:pPr algn="ctr" indent="0" marL="0">
+            <a:pPr eaLnBrk="0" algn="ctr" indent="0" marL="0">
               <a:buNone/>
             </a:pPr>
             <a:r>
@@ -4725,7 +4725,7 @@
           <a:bodyPr wrap="square" lIns="0" tIns="0" rIns="0" bIns="0" rtlCol="0" anchor="ctr"/>
           <a:lstStyle/>
           <a:p>
-            <a:pPr algn="l" indent="0" marL="0">
+            <a:pPr eaLnBrk="0" algn="l" indent="0" marL="0">
               <a:buNone/>
             </a:pPr>
             <a:r>
@@ -4782,7 +4782,7 @@
             </a:lvl1pPr>
           </a:lstStyle>
           <a:p>
-            <a:pPr algn="r"/>
+            <a:pPr eaLnBrk="0" algn="r"/>
             <a:fld id="{F7021451-1387-4CA6-816F-3879F97B5CBC}" type="slidenum">
               <a:rPr b="0" lang="en-US"/>
               <a:t>2</a:t>
@@ -4839,7 +4839,7 @@
           <a:bodyPr wrap="square" lIns="0" tIns="0" rIns="0" bIns="0" rtlCol="0" anchor="ctr"/>
           <a:lstStyle/>
           <a:p>
-            <a:pPr algn="l" indent="0" marL="0">
+            <a:pPr eaLnBrk="0" algn="l" indent="0" marL="0">
               <a:buNone/>
             </a:pPr>
             <a:r>
@@ -4905,7 +4905,7 @@
           <a:bodyPr wrap="square" lIns="0" tIns="0" rIns="0" bIns="0" rtlCol="0" anchor="ctr"/>
           <a:lstStyle/>
           <a:p>
-            <a:pPr indent="0" marL="0">
+            <a:pPr eaLnBrk="0" indent="0" marL="0">
               <a:spcAft>
                 <a:spcPts val="600"/>
               </a:spcAft>
@@ -4974,7 +4974,7 @@
           <a:bodyPr wrap="square" lIns="0" tIns="0" rIns="0" bIns="0" rtlCol="0" anchor="ctr"/>
           <a:lstStyle/>
           <a:p>
-            <a:pPr indent="0" marL="0">
+            <a:pPr eaLnBrk="0" indent="0" marL="0">
               <a:spcAft>
                 <a:spcPts val="600"/>
               </a:spcAft>
@@ -4994,7 +4994,7 @@
             <a:endParaRPr lang="ko-KR" sz="3000" dirty="0"/>
           </a:p>
           <a:p>
-            <a:pPr indent="0" marL="0">
+            <a:pPr eaLnBrk="0" indent="0" marL="0">
               <a:spcAft>
                 <a:spcPts val="600"/>
               </a:spcAft>
@@ -5063,7 +5063,7 @@
           <a:bodyPr wrap="square" lIns="0" tIns="0" rIns="0" bIns="0" rtlCol="0" anchor="ctr"/>
           <a:lstStyle/>
           <a:p>
-            <a:pPr indent="0" marL="0">
+            <a:pPr eaLnBrk="0" indent="0" marL="0">
               <a:spcAft>
                 <a:spcPts val="600"/>
               </a:spcAft>
@@ -5083,7 +5083,7 @@
             <a:endParaRPr lang="ko-KR" sz="3000" dirty="0"/>
           </a:p>
           <a:p>
-            <a:pPr indent="0" marL="0">
+            <a:pPr eaLnBrk="0" indent="0" marL="0">
               <a:spcAft>
                 <a:spcPts val="600"/>
               </a:spcAft>
@@ -5152,7 +5152,7 @@
           <a:bodyPr wrap="square" lIns="0" tIns="0" rIns="0" bIns="0" rtlCol="0" anchor="ctr"/>
           <a:lstStyle/>
           <a:p>
-            <a:pPr indent="0" marL="0">
+            <a:pPr eaLnBrk="0" indent="0" marL="0">
               <a:spcAft>
                 <a:spcPts val="600"/>
               </a:spcAft>
@@ -5172,7 +5172,7 @@
             <a:endParaRPr lang="ko-KR" sz="3000" dirty="0"/>
           </a:p>
           <a:p>
-            <a:pPr indent="0" marL="0">
+            <a:pPr eaLnBrk="0" indent="0" marL="0">
               <a:spcAft>
                 <a:spcPts val="600"/>
               </a:spcAft>
@@ -5232,7 +5232,7 @@
             </a:lvl1pPr>
           </a:lstStyle>
           <a:p>
-            <a:pPr algn="r"/>
+            <a:pPr eaLnBrk="0" algn="r"/>
             <a:fld id="{F7021451-1387-4CA6-816F-3879F97B5CBC}" type="slidenum">
               <a:rPr b="0" lang="en-US"/>
               <a:t>3</a:t>
@@ -5289,7 +5289,7 @@
           <a:bodyPr wrap="square" lIns="0" tIns="0" rIns="0" bIns="0" rtlCol="0" anchor="ctr"/>
           <a:lstStyle/>
           <a:p>
-            <a:pPr algn="l" indent="0" marL="0">
+            <a:pPr eaLnBrk="0" algn="l" indent="0" marL="0">
               <a:buNone/>
             </a:pPr>
             <a:r>
@@ -5355,7 +5355,7 @@
           <a:bodyPr wrap="square" lIns="0" tIns="0" rIns="0" bIns="0" rtlCol="0" anchor="ctr"/>
           <a:lstStyle/>
           <a:p>
-            <a:pPr indent="0" marL="0">
+            <a:pPr eaLnBrk="0" indent="0" marL="0">
               <a:spcAft>
                 <a:spcPts val="600"/>
               </a:spcAft>
@@ -5424,7 +5424,7 @@
           <a:bodyPr wrap="square" lIns="0" tIns="0" rIns="0" bIns="0" rtlCol="0" anchor="t"/>
           <a:lstStyle/>
           <a:p>
-            <a:pPr indent="0" marL="0">
+            <a:pPr eaLnBrk="0" algn="l" indent="0" marL="0">
               <a:lnSpc>
                 <a:spcPct val="105000"/>
               </a:lnSpc>
@@ -5447,7 +5447,7 @@
             <a:endParaRPr lang="ko-KR" sz="2800" dirty="0"/>
           </a:p>
           <a:p>
-            <a:pPr indent="0" marL="0">
+            <a:pPr eaLnBrk="0" algn="l" indent="0" marL="0">
               <a:lnSpc>
                 <a:spcPct val="105000"/>
               </a:lnSpc>
@@ -5470,7 +5470,7 @@
             <a:endParaRPr lang="ko-KR" sz="2800" dirty="0"/>
           </a:p>
           <a:p>
-            <a:pPr indent="0" marL="0">
+            <a:pPr eaLnBrk="0" algn="l" indent="0" marL="0">
               <a:lnSpc>
                 <a:spcPct val="105000"/>
               </a:lnSpc>
@@ -5533,7 +5533,7 @@
             </a:lvl1pPr>
           </a:lstStyle>
           <a:p>
-            <a:pPr algn="r"/>
+            <a:pPr eaLnBrk="0" algn="r"/>
             <a:fld id="{F7021451-1387-4CA6-816F-3879F97B5CBC}" type="slidenum">
               <a:rPr b="0" lang="en-US"/>
               <a:t>4</a:t>
@@ -5590,7 +5590,7 @@
           <a:bodyPr wrap="square" lIns="0" tIns="0" rIns="0" bIns="0" rtlCol="0" anchor="ctr"/>
           <a:lstStyle/>
           <a:p>
-            <a:pPr algn="l" indent="0" marL="0">
+            <a:pPr eaLnBrk="0" algn="l" indent="0" marL="0">
               <a:buNone/>
             </a:pPr>
             <a:r>
@@ -5656,7 +5656,7 @@
           <a:bodyPr wrap="square" lIns="0" tIns="0" rIns="0" bIns="0" rtlCol="0" anchor="ctr"/>
           <a:lstStyle/>
           <a:p>
-            <a:pPr indent="0" marL="0">
+            <a:pPr eaLnBrk="0" indent="0" marL="0">
               <a:spcAft>
                 <a:spcPts val="600"/>
               </a:spcAft>
@@ -5676,7 +5676,7 @@
             <a:endParaRPr lang="ko-KR" sz="3000" dirty="0"/>
           </a:p>
           <a:p>
-            <a:pPr indent="0" marL="0">
+            <a:pPr eaLnBrk="0" indent="0" marL="0">
               <a:spcAft>
                 <a:spcPts val="600"/>
               </a:spcAft>
@@ -5745,7 +5745,7 @@
           <a:bodyPr wrap="square" lIns="0" tIns="0" rIns="0" bIns="0" rtlCol="0" anchor="ctr"/>
           <a:lstStyle/>
           <a:p>
-            <a:pPr indent="0" marL="0">
+            <a:pPr eaLnBrk="0" indent="0" marL="0">
               <a:spcAft>
                 <a:spcPts val="600"/>
               </a:spcAft>
@@ -5765,7 +5765,7 @@
             <a:endParaRPr lang="ko-KR" sz="3000" dirty="0"/>
           </a:p>
           <a:p>
-            <a:pPr indent="0" marL="0">
+            <a:pPr eaLnBrk="0" indent="0" marL="0">
               <a:spcAft>
                 <a:spcPts val="600"/>
               </a:spcAft>
@@ -5834,7 +5834,7 @@
           <a:bodyPr wrap="square" lIns="0" tIns="0" rIns="0" bIns="0" rtlCol="0" anchor="ctr"/>
           <a:lstStyle/>
           <a:p>
-            <a:pPr indent="0" marL="0">
+            <a:pPr eaLnBrk="0" indent="0" marL="0">
               <a:spcAft>
                 <a:spcPts val="600"/>
               </a:spcAft>
@@ -5854,7 +5854,7 @@
             <a:endParaRPr lang="ko-KR" sz="3000" dirty="0"/>
           </a:p>
           <a:p>
-            <a:pPr indent="0" marL="0">
+            <a:pPr eaLnBrk="0" indent="0" marL="0">
               <a:spcAft>
                 <a:spcPts val="600"/>
               </a:spcAft>
@@ -5923,7 +5923,7 @@
           <a:bodyPr wrap="square" lIns="0" tIns="0" rIns="0" bIns="0" rtlCol="0" anchor="ctr"/>
           <a:lstStyle/>
           <a:p>
-            <a:pPr indent="0" marL="0">
+            <a:pPr eaLnBrk="0" indent="0" marL="0">
               <a:spcAft>
                 <a:spcPts val="600"/>
               </a:spcAft>
@@ -5943,7 +5943,7 @@
             <a:endParaRPr lang="ko-KR" sz="3000" dirty="0"/>
           </a:p>
           <a:p>
-            <a:pPr indent="0" marL="0">
+            <a:pPr eaLnBrk="0" indent="0" marL="0">
               <a:spcAft>
                 <a:spcPts val="600"/>
               </a:spcAft>
@@ -6003,7 +6003,7 @@
             </a:lvl1pPr>
           </a:lstStyle>
           <a:p>
-            <a:pPr algn="r"/>
+            <a:pPr eaLnBrk="0" algn="r"/>
             <a:fld id="{F7021451-1387-4CA6-816F-3879F97B5CBC}" type="slidenum">
               <a:rPr b="0" lang="en-US"/>
               <a:t>5</a:t>
@@ -6060,7 +6060,7 @@
           <a:bodyPr wrap="square" lIns="0" tIns="0" rIns="0" bIns="0" rtlCol="0" anchor="ctr"/>
           <a:lstStyle/>
           <a:p>
-            <a:pPr algn="l" indent="0" marL="0">
+            <a:pPr eaLnBrk="0" algn="l" indent="0" marL="0">
               <a:buNone/>
             </a:pPr>
             <a:r>
@@ -6099,7 +6099,7 @@
           <a:bodyPr wrap="square" lIns="0" tIns="0" rIns="0" bIns="0" rtlCol="0" anchor="ctr"/>
           <a:lstStyle/>
           <a:p>
-            <a:pPr algn="l" indent="0" marL="0">
+            <a:pPr eaLnBrk="0" algn="l" indent="0" marL="0">
               <a:buNone/>
             </a:pPr>
             <a:r>
@@ -6146,7 +6146,7 @@
           <a:bodyPr wrap="square" lIns="0" tIns="0" rIns="0" bIns="0" rtlCol="0" anchor="ctr"/>
           <a:lstStyle/>
           <a:p>
-            <a:pPr algn="ctr" indent="0" marL="0">
+            <a:pPr eaLnBrk="0" algn="ctr" indent="0" marL="0">
               <a:buNone/>
             </a:pPr>
             <a:r>
@@ -6185,7 +6185,7 @@
           <a:bodyPr wrap="square" lIns="0" tIns="0" rIns="0" bIns="0" rtlCol="0" anchor="ctr"/>
           <a:lstStyle/>
           <a:p>
-            <a:pPr algn="l" indent="0" marL="0">
+            <a:pPr eaLnBrk="0" algn="l" indent="0" marL="0">
               <a:buNone/>
             </a:pPr>
             <a:r>
@@ -6232,7 +6232,7 @@
           <a:bodyPr wrap="square" lIns="0" tIns="0" rIns="0" bIns="0" rtlCol="0" anchor="ctr"/>
           <a:lstStyle/>
           <a:p>
-            <a:pPr algn="ctr" indent="0" marL="0">
+            <a:pPr eaLnBrk="0" algn="ctr" indent="0" marL="0">
               <a:buNone/>
             </a:pPr>
             <a:r>
@@ -6271,7 +6271,7 @@
           <a:bodyPr wrap="square" lIns="0" tIns="0" rIns="0" bIns="0" rtlCol="0" anchor="ctr"/>
           <a:lstStyle/>
           <a:p>
-            <a:pPr algn="l" indent="0" marL="0">
+            <a:pPr eaLnBrk="0" algn="l" indent="0" marL="0">
               <a:buNone/>
             </a:pPr>
             <a:r>
@@ -6318,7 +6318,7 @@
           <a:bodyPr wrap="square" lIns="0" tIns="0" rIns="0" bIns="0" rtlCol="0" anchor="ctr"/>
           <a:lstStyle/>
           <a:p>
-            <a:pPr algn="ctr" indent="0" marL="0">
+            <a:pPr eaLnBrk="0" algn="ctr" indent="0" marL="0">
               <a:buNone/>
             </a:pPr>
             <a:r>
@@ -6357,7 +6357,7 @@
           <a:bodyPr wrap="square" lIns="0" tIns="0" rIns="0" bIns="0" rtlCol="0" anchor="ctr"/>
           <a:lstStyle/>
           <a:p>
-            <a:pPr algn="l" indent="0" marL="0">
+            <a:pPr eaLnBrk="0" algn="l" indent="0" marL="0">
               <a:buNone/>
             </a:pPr>
             <a:r>
@@ -6404,7 +6404,7 @@
           <a:bodyPr wrap="square" lIns="0" tIns="0" rIns="0" bIns="0" rtlCol="0" anchor="ctr"/>
           <a:lstStyle/>
           <a:p>
-            <a:pPr algn="ctr" indent="0" marL="0">
+            <a:pPr eaLnBrk="0" algn="ctr" indent="0" marL="0">
               <a:buNone/>
             </a:pPr>
             <a:r>
@@ -6443,7 +6443,7 @@
           <a:bodyPr wrap="square" lIns="0" tIns="0" rIns="0" bIns="0" rtlCol="0" anchor="ctr"/>
           <a:lstStyle/>
           <a:p>
-            <a:pPr algn="l" indent="0" marL="0">
+            <a:pPr eaLnBrk="0" algn="l" indent="0" marL="0">
               <a:buNone/>
             </a:pPr>
             <a:r>
@@ -6490,7 +6490,7 @@
           <a:bodyPr wrap="square" lIns="0" tIns="0" rIns="0" bIns="0" rtlCol="0" anchor="ctr"/>
           <a:lstStyle/>
           <a:p>
-            <a:pPr algn="ctr" indent="0" marL="0">
+            <a:pPr eaLnBrk="0" algn="ctr" indent="0" marL="0">
               <a:buNone/>
             </a:pPr>
             <a:r>
@@ -6529,7 +6529,7 @@
           <a:bodyPr wrap="square" lIns="0" tIns="0" rIns="0" bIns="0" rtlCol="0" anchor="ctr"/>
           <a:lstStyle/>
           <a:p>
-            <a:pPr algn="l" indent="0" marL="0">
+            <a:pPr eaLnBrk="0" algn="l" indent="0" marL="0">
               <a:buNone/>
             </a:pPr>
             <a:r>
@@ -6576,7 +6576,7 @@
           <a:bodyPr wrap="square" lIns="0" tIns="0" rIns="0" bIns="0" rtlCol="0" anchor="ctr"/>
           <a:lstStyle/>
           <a:p>
-            <a:pPr algn="ctr" indent="0" marL="0">
+            <a:pPr eaLnBrk="0" algn="ctr" indent="0" marL="0">
               <a:buNone/>
             </a:pPr>
             <a:r>
@@ -6615,7 +6615,7 @@
           <a:bodyPr wrap="square" lIns="0" tIns="0" rIns="0" bIns="0" rtlCol="0" anchor="ctr"/>
           <a:lstStyle/>
           <a:p>
-            <a:pPr algn="l" indent="0" marL="0">
+            <a:pPr eaLnBrk="0" algn="l" indent="0" marL="0">
               <a:buNone/>
             </a:pPr>
             <a:r>
@@ -6672,7 +6672,7 @@
             </a:lvl1pPr>
           </a:lstStyle>
           <a:p>
-            <a:pPr algn="r"/>
+            <a:pPr eaLnBrk="0" algn="r"/>
             <a:fld id="{F7021451-1387-4CA6-816F-3879F97B5CBC}" type="slidenum">
               <a:rPr b="0" lang="en-US"/>
               <a:t>6</a:t>
@@ -6729,7 +6729,7 @@
           <a:bodyPr wrap="square" lIns="0" tIns="0" rIns="0" bIns="0" rtlCol="0" anchor="ctr"/>
           <a:lstStyle/>
           <a:p>
-            <a:pPr algn="l" indent="0" marL="0">
+            <a:pPr eaLnBrk="0" algn="l" indent="0" marL="0">
               <a:buNone/>
             </a:pPr>
             <a:r>
@@ -6795,7 +6795,7 @@
           <a:bodyPr wrap="square" lIns="0" tIns="0" rIns="0" bIns="0" rtlCol="0" anchor="ctr"/>
           <a:lstStyle/>
           <a:p>
-            <a:pPr indent="0" marL="0">
+            <a:pPr eaLnBrk="0" indent="0" marL="0">
               <a:spcAft>
                 <a:spcPts val="600"/>
               </a:spcAft>
@@ -6864,7 +6864,7 @@
           <a:bodyPr wrap="square" lIns="0" tIns="0" rIns="0" bIns="0" rtlCol="0" anchor="ctr"/>
           <a:lstStyle/>
           <a:p>
-            <a:pPr indent="0" marL="0">
+            <a:pPr eaLnBrk="0" indent="0" marL="0">
               <a:spcAft>
                 <a:spcPts val="600"/>
               </a:spcAft>
@@ -6914,7 +6914,7 @@
           <a:bodyPr wrap="square" lIns="177800" tIns="0" rIns="177800" bIns="0" rtlCol="0" anchor="ctr"/>
           <a:lstStyle/>
           <a:p>
-            <a:pPr algn="l" indent="0" marL="0">
+            <a:pPr eaLnBrk="0" algn="l" indent="0" marL="0">
               <a:buNone/>
             </a:pPr>
             <a:r>
@@ -6953,7 +6953,7 @@
           <a:bodyPr wrap="square" lIns="0" tIns="0" rIns="0" bIns="0" rtlCol="0" anchor="t"/>
           <a:lstStyle/>
           <a:p>
-            <a:pPr algn="l" indent="0" marL="0">
+            <a:pPr eaLnBrk="0" algn="l" indent="0" marL="0">
               <a:buNone/>
             </a:pPr>
             <a:r>
@@ -6970,7 +6970,7 @@
             <a:endParaRPr lang="ko-KR" sz="3000" dirty="0"/>
           </a:p>
           <a:p>
-            <a:pPr algn="l" indent="0" marL="0">
+            <a:pPr eaLnBrk="0" algn="l" indent="0" marL="0">
               <a:buNone/>
             </a:pPr>
             <a:r>
@@ -6987,7 +6987,7 @@
             <a:endParaRPr lang="ko-KR" sz="3000" dirty="0"/>
           </a:p>
           <a:p>
-            <a:pPr algn="l" indent="0" marL="0">
+            <a:pPr eaLnBrk="0" algn="l" indent="0" marL="0">
               <a:buNone/>
             </a:pPr>
             <a:r>
@@ -7004,7 +7004,7 @@
             <a:endParaRPr lang="ko-KR" sz="3000" dirty="0"/>
           </a:p>
           <a:p>
-            <a:pPr algn="l" indent="0" marL="0">
+            <a:pPr eaLnBrk="0" algn="l" indent="0" marL="0">
               <a:buNone/>
             </a:pPr>
             <a:r>
@@ -7051,7 +7051,7 @@
           <a:bodyPr wrap="square" lIns="177800" tIns="0" rIns="177800" bIns="0" rtlCol="0" anchor="ctr"/>
           <a:lstStyle/>
           <a:p>
-            <a:pPr algn="l" indent="0" marL="0">
+            <a:pPr eaLnBrk="0" algn="l" indent="0" marL="0">
               <a:buNone/>
             </a:pPr>
             <a:r>
@@ -7090,7 +7090,7 @@
           <a:bodyPr wrap="square" lIns="0" tIns="0" rIns="0" bIns="0" rtlCol="0" anchor="t"/>
           <a:lstStyle/>
           <a:p>
-            <a:pPr algn="l" indent="0" marL="0">
+            <a:pPr eaLnBrk="0" algn="l" indent="0" marL="0">
               <a:buNone/>
             </a:pPr>
             <a:r>
@@ -7107,7 +7107,7 @@
             <a:endParaRPr lang="ko-KR" sz="3000" dirty="0"/>
           </a:p>
           <a:p>
-            <a:pPr algn="l" indent="0" marL="0">
+            <a:pPr eaLnBrk="0" algn="l" indent="0" marL="0">
               <a:buNone/>
             </a:pPr>
             <a:r>
@@ -7124,7 +7124,7 @@
             <a:endParaRPr lang="ko-KR" sz="3000" dirty="0"/>
           </a:p>
           <a:p>
-            <a:pPr algn="l" indent="0" marL="0">
+            <a:pPr eaLnBrk="0" algn="l" indent="0" marL="0">
               <a:buNone/>
             </a:pPr>
             <a:r>
@@ -7141,7 +7141,7 @@
             <a:endParaRPr lang="ko-KR" sz="3000" dirty="0"/>
           </a:p>
           <a:p>
-            <a:pPr algn="l" indent="0" marL="0">
+            <a:pPr eaLnBrk="0" algn="l" indent="0" marL="0">
               <a:buNone/>
             </a:pPr>
             <a:r>
@@ -7198,7 +7198,7 @@
             </a:lvl1pPr>
           </a:lstStyle>
           <a:p>
-            <a:pPr algn="r"/>
+            <a:pPr eaLnBrk="0" algn="r"/>
             <a:fld id="{F7021451-1387-4CA6-816F-3879F97B5CBC}" type="slidenum">
               <a:rPr b="0" lang="en-US"/>
               <a:t>7</a:t>
@@ -7255,7 +7255,7 @@
           <a:bodyPr wrap="square" lIns="0" tIns="0" rIns="0" bIns="0" rtlCol="0" anchor="ctr"/>
           <a:lstStyle/>
           <a:p>
-            <a:pPr algn="l" indent="0" marL="0">
+            <a:pPr eaLnBrk="0" algn="l" indent="0" marL="0">
               <a:buNone/>
             </a:pPr>
             <a:r>
@@ -7321,7 +7321,7 @@
           <a:bodyPr wrap="square" lIns="0" tIns="0" rIns="0" bIns="0" rtlCol="0" anchor="ctr"/>
           <a:lstStyle/>
           <a:p>
-            <a:pPr indent="0" marL="0">
+            <a:pPr eaLnBrk="0" indent="0" marL="0">
               <a:spcAft>
                 <a:spcPts val="600"/>
               </a:spcAft>
@@ -7341,7 +7341,7 @@
             <a:endParaRPr lang="ko-KR" sz="3000" dirty="0"/>
           </a:p>
           <a:p>
-            <a:pPr indent="0" marL="0">
+            <a:pPr eaLnBrk="0" indent="0" marL="0">
               <a:spcAft>
                 <a:spcPts val="600"/>
               </a:spcAft>
@@ -7361,7 +7361,7 @@
             <a:endParaRPr lang="ko-KR" sz="3000" dirty="0"/>
           </a:p>
           <a:p>
-            <a:pPr indent="0" marL="0">
+            <a:pPr eaLnBrk="0" indent="0" marL="0">
               <a:spcAft>
                 <a:spcPts val="600"/>
               </a:spcAft>
@@ -7381,7 +7381,7 @@
             <a:endParaRPr lang="ko-KR" sz="3000" dirty="0"/>
           </a:p>
           <a:p>
-            <a:pPr indent="0" marL="0">
+            <a:pPr eaLnBrk="0" indent="0" marL="0">
               <a:spcAft>
                 <a:spcPts val="600"/>
               </a:spcAft>
@@ -7401,7 +7401,7 @@
             <a:endParaRPr lang="ko-KR" sz="3000" dirty="0"/>
           </a:p>
           <a:p>
-            <a:pPr indent="0" marL="0">
+            <a:pPr eaLnBrk="0" indent="0" marL="0">
               <a:spcAft>
                 <a:spcPts val="600"/>
               </a:spcAft>
@@ -7449,7 +7449,7 @@
           <a:bodyPr wrap="square" lIns="0" tIns="0" rIns="0" bIns="0" rtlCol="0" anchor="ctr"/>
           <a:lstStyle/>
           <a:p>
-            <a:pPr algn="ctr" indent="0" marL="0">
+            <a:pPr eaLnBrk="0" algn="ctr" indent="0" marL="0">
               <a:buNone/>
             </a:pPr>
             <a:r>
@@ -7488,7 +7488,7 @@
           <a:bodyPr wrap="square" lIns="0" tIns="0" rIns="0" bIns="0" rtlCol="0" anchor="t"/>
           <a:lstStyle/>
           <a:p>
-            <a:pPr algn="l" indent="0" marL="0">
+            <a:pPr eaLnBrk="0" algn="l" indent="0" marL="0">
               <a:buNone/>
             </a:pPr>
             <a:r>
@@ -7533,7 +7533,7 @@
           <a:bodyPr wrap="square" lIns="0" tIns="0" rIns="0" bIns="0" rtlCol="0" anchor="ctr"/>
           <a:lstStyle/>
           <a:p>
-            <a:pPr algn="ctr" indent="0" marL="0">
+            <a:pPr eaLnBrk="0" algn="ctr" indent="0" marL="0">
               <a:buNone/>
             </a:pPr>
             <a:r>
@@ -7572,7 +7572,7 @@
           <a:bodyPr wrap="square" lIns="0" tIns="0" rIns="0" bIns="0" rtlCol="0" anchor="t"/>
           <a:lstStyle/>
           <a:p>
-            <a:pPr algn="l" indent="0" marL="0">
+            <a:pPr eaLnBrk="0" algn="l" indent="0" marL="0">
               <a:buNone/>
             </a:pPr>
             <a:r>
@@ -7617,7 +7617,7 @@
           <a:bodyPr wrap="square" lIns="0" tIns="0" rIns="0" bIns="0" rtlCol="0" anchor="ctr"/>
           <a:lstStyle/>
           <a:p>
-            <a:pPr algn="ctr" indent="0" marL="0">
+            <a:pPr eaLnBrk="0" algn="ctr" indent="0" marL="0">
               <a:buNone/>
             </a:pPr>
             <a:r>
@@ -7656,7 +7656,7 @@
           <a:bodyPr wrap="square" lIns="0" tIns="0" rIns="0" bIns="0" rtlCol="0" anchor="t"/>
           <a:lstStyle/>
           <a:p>
-            <a:pPr algn="l" indent="0" marL="0">
+            <a:pPr eaLnBrk="0" algn="l" indent="0" marL="0">
               <a:buNone/>
             </a:pPr>
             <a:r>
@@ -7713,7 +7713,7 @@
             </a:lvl1pPr>
           </a:lstStyle>
           <a:p>
-            <a:pPr algn="r"/>
+            <a:pPr eaLnBrk="0" algn="r"/>
             <a:fld id="{F7021451-1387-4CA6-816F-3879F97B5CBC}" type="slidenum">
               <a:rPr b="0" lang="en-US"/>
               <a:t>8</a:t>
@@ -7770,7 +7770,7 @@
           <a:bodyPr wrap="square" lIns="0" tIns="0" rIns="0" bIns="0" rtlCol="0" anchor="ctr"/>
           <a:lstStyle/>
           <a:p>
-            <a:pPr algn="l" indent="0" marL="0">
+            <a:pPr eaLnBrk="0" algn="l" indent="0" marL="0">
               <a:buNone/>
             </a:pPr>
             <a:r>
@@ -7809,7 +7809,7 @@
           <a:bodyPr wrap="square" lIns="0" tIns="0" rIns="0" bIns="0" rtlCol="0" anchor="ctr"/>
           <a:lstStyle/>
           <a:p>
-            <a:pPr algn="l" indent="0" marL="0">
+            <a:pPr eaLnBrk="0" algn="l" indent="0" marL="0">
               <a:buNone/>
             </a:pPr>
             <a:r>
@@ -7875,7 +7875,7 @@
           <a:bodyPr wrap="square" lIns="0" tIns="0" rIns="0" bIns="0" rtlCol="0" anchor="ctr"/>
           <a:lstStyle/>
           <a:p>
-            <a:pPr indent="0" marL="0">
+            <a:pPr eaLnBrk="0" indent="0" marL="0">
               <a:spcAft>
                 <a:spcPts val="600"/>
               </a:spcAft>
@@ -7944,7 +7944,7 @@
           <a:bodyPr wrap="square" lIns="0" tIns="0" rIns="0" bIns="0" rtlCol="0" anchor="ctr"/>
           <a:lstStyle/>
           <a:p>
-            <a:pPr indent="0" marL="0">
+            <a:pPr eaLnBrk="0" indent="0" marL="0">
               <a:spcAft>
                 <a:spcPts val="600"/>
               </a:spcAft>
@@ -7964,7 +7964,7 @@
             <a:endParaRPr lang="ko-KR" sz="3000" dirty="0"/>
           </a:p>
           <a:p>
-            <a:pPr indent="0" marL="0">
+            <a:pPr eaLnBrk="0" indent="0" marL="0">
               <a:spcAft>
                 <a:spcPts val="600"/>
               </a:spcAft>
@@ -8033,7 +8033,7 @@
           <a:bodyPr wrap="square" lIns="0" tIns="0" rIns="0" bIns="0" rtlCol="0" anchor="ctr"/>
           <a:lstStyle/>
           <a:p>
-            <a:pPr indent="0" marL="0">
+            <a:pPr eaLnBrk="0" indent="0" marL="0">
               <a:spcAft>
                 <a:spcPts val="600"/>
               </a:spcAft>
@@ -8053,7 +8053,7 @@
             <a:endParaRPr lang="ko-KR" sz="3000" dirty="0"/>
           </a:p>
           <a:p>
-            <a:pPr indent="0" marL="0">
+            <a:pPr eaLnBrk="0" indent="0" marL="0">
               <a:spcAft>
                 <a:spcPts val="600"/>
               </a:spcAft>
@@ -8122,7 +8122,7 @@
           <a:bodyPr wrap="square" lIns="0" tIns="0" rIns="0" bIns="0" rtlCol="0" anchor="ctr"/>
           <a:lstStyle/>
           <a:p>
-            <a:pPr indent="0" marL="0">
+            <a:pPr eaLnBrk="0" indent="0" marL="0">
               <a:spcAft>
                 <a:spcPts val="600"/>
               </a:spcAft>
@@ -8142,7 +8142,7 @@
             <a:endParaRPr lang="ko-KR" sz="3000" dirty="0"/>
           </a:p>
           <a:p>
-            <a:pPr indent="0" marL="0">
+            <a:pPr eaLnBrk="0" indent="0" marL="0">
               <a:spcAft>
                 <a:spcPts val="600"/>
               </a:spcAft>
@@ -8202,7 +8202,7 @@
             </a:lvl1pPr>
           </a:lstStyle>
           <a:p>
-            <a:pPr algn="r"/>
+            <a:pPr eaLnBrk="0" algn="r"/>
             <a:fld id="{F7021451-1387-4CA6-816F-3879F97B5CBC}" type="slidenum">
               <a:rPr b="0" lang="en-US"/>
               <a:t>9</a:t>

--- a/dist/초3/국어/발표와쓰기/초3_국어_발표와쓰기_01_조사한내용발표하기_학생용.pptx
+++ b/dist/초3/국어/발표와쓰기/초3_국어_발표와쓰기_01_조사한내용발표하기_학생용.pptx
@@ -118,38 +118,38 @@
   <p:extLst>
     <p:ext uri="{521415D9-36F7-43E2-AB2F-B90AF26B5E84}">
       <p14:sectionLst xmlns:p14="http://schemas.microsoft.com/office/powerpoint/2010/main">
-        <p14:section name="도입" id="{518b55c5-f7d5-2f7c-af6e-799618f41443}">
+        <p14:section name="도입" id="{09206962-f2d4-405d-9535-f14619926b36}">
           <p14:sldIdLst>
             <p14:sldId id="256"/>
             <p14:sldId id="257"/>
           </p14:sldIdLst>
         </p14:section>
-        <p14:section name="개념" id="{098a71ea-1d9d-7d3f-18a5-4ec39536673b}">
+        <p14:section name="개념" id="{e749555b-9b61-d19a-5a5c-a7e538958930}">
           <p14:sldIdLst>
             <p14:sldId id="258"/>
             <p14:sldId id="259"/>
             <p14:sldId id="260"/>
           </p14:sldIdLst>
         </p14:section>
-        <p14:section name="연습" id="{30cfd5bf-19a3-5228-60c5-d7c6c4823348}">
+        <p14:section name="연습" id="{8e54ffca-0edf-dd44-6fe7-369f9d88cd39}">
           <p14:sldIdLst>
             <p14:sldId id="261"/>
             <p14:sldId id="262"/>
             <p14:sldId id="263"/>
           </p14:sldIdLst>
         </p14:section>
-        <p14:section name="확인" id="{64a43b6f-d70f-cba7-68ba-f5fd4870d7c8}">
+        <p14:section name="확인" id="{d838707b-ae82-cb42-0102-443d4731cafb}">
           <p14:sldIdLst>
             <p14:sldId id="264"/>
             <p14:sldId id="265"/>
           </p14:sldIdLst>
         </p14:section>
-        <p14:section name="정리" id="{7d22a2c4-830e-6ae5-7c4b-9acdc43a41aa}">
+        <p14:section name="정리" id="{37864dbf-66a3-f906-37d1-f05351354325}">
           <p14:sldIdLst>
             <p14:sldId id="266"/>
           </p14:sldIdLst>
         </p14:section>
-        <p14:section name="보충" id="{08da44c8-260f-e68e-c51c-92a317a6d6c4}">
+        <p14:section name="보충" id="{066378c9-f5b3-9e64-4ae4-180245877be8}">
           <p14:sldIdLst>
             <p14:sldId id="267"/>
           </p14:sldIdLst>

--- a/dist/초3/국어/발표와쓰기/초3_국어_발표와쓰기_01_조사한내용발표하기_학생용.pptx
+++ b/dist/초3/국어/발표와쓰기/초3_국어_발표와쓰기_01_조사한내용발표하기_학생용.pptx
@@ -118,38 +118,38 @@
   <p:extLst>
     <p:ext uri="{521415D9-36F7-43E2-AB2F-B90AF26B5E84}">
       <p14:sectionLst xmlns:p14="http://schemas.microsoft.com/office/powerpoint/2010/main">
-        <p14:section name="도입" id="{09206962-f2d4-405d-9535-f14619926b36}">
+        <p14:section name="도입" id="{b87b4c52-9dd4-ad9e-e4ab-723b629517a3}">
           <p14:sldIdLst>
             <p14:sldId id="256"/>
             <p14:sldId id="257"/>
           </p14:sldIdLst>
         </p14:section>
-        <p14:section name="개념" id="{e749555b-9b61-d19a-5a5c-a7e538958930}">
+        <p14:section name="개념" id="{a6be20ee-12dd-1a18-f951-de216eaa71c6}">
           <p14:sldIdLst>
             <p14:sldId id="258"/>
             <p14:sldId id="259"/>
             <p14:sldId id="260"/>
           </p14:sldIdLst>
         </p14:section>
-        <p14:section name="연습" id="{8e54ffca-0edf-dd44-6fe7-369f9d88cd39}">
+        <p14:section name="연습" id="{6e8ad039-f8c1-2a5d-0825-ecb36ca99401}">
           <p14:sldIdLst>
             <p14:sldId id="261"/>
             <p14:sldId id="262"/>
             <p14:sldId id="263"/>
           </p14:sldIdLst>
         </p14:section>
-        <p14:section name="확인" id="{d838707b-ae82-cb42-0102-443d4731cafb}">
+        <p14:section name="확인" id="{148d2d37-8795-c2f4-2823-8b3bd9a2d312}">
           <p14:sldIdLst>
             <p14:sldId id="264"/>
             <p14:sldId id="265"/>
           </p14:sldIdLst>
         </p14:section>
-        <p14:section name="정리" id="{37864dbf-66a3-f906-37d1-f05351354325}">
+        <p14:section name="정리" id="{c9079b2f-c5e5-ca31-4b4d-f6c42db197e8}">
           <p14:sldIdLst>
             <p14:sldId id="266"/>
           </p14:sldIdLst>
         </p14:section>
-        <p14:section name="보충" id="{066378c9-f5b3-9e64-4ae4-180245877be8}">
+        <p14:section name="보충" id="{e40a7335-0317-fa95-86f8-c6648c3c0ae7}">
           <p14:sldIdLst>
             <p14:sldId id="267"/>
           </p14:sldIdLst>
